--- a/curso/pptx/S18.pptx
+++ b/curso/pptx/S18.pptx
@@ -3819,8 +3819,8 @@
         </p:nvSpPr>
         <p:spPr>
           <a:xfrm>
-            <a:off x="640000" y="420000"/>
-            <a:ext cx="10912000" cy="420000"/>
+            <a:off x="10652000" y="380000"/>
+            <a:ext cx="900000" cy="800000"/>
           </a:xfrm>
           <a:prstGeom prst="rect">
             <a:avLst/>
@@ -3835,17 +3835,17 @@
           <a:p>
             <a:pPr>
               <a:spcAft>
-                <a:spcPts val="810"/>
+                <a:spcPts val="1980"/>
               </a:spcAft>
             </a:pPr>
             <a:r>
-              <a:rPr sz="1800" b="1">
+              <a:rPr sz="4400" b="0">
                 <a:solidFill>
                   <a:srgbClr val="1F2A44"/>
                 </a:solidFill>
                 <a:latin typeface="Nunito Sans"/>
               </a:rPr>
-              <a:t>🦉 Aula de Filosofía</a:t>
+              <a:t>🙃</a:t>
             </a:r>
           </a:p>
         </p:txBody>

--- a/curso/pptx/S18.pptx
+++ b/curso/pptx/S18.pptx
@@ -470,356 +470,6 @@
     </a:lvl9pPr>
   </p:notesStyle>
 </p:notesMaster>
-</file>
-
-<file path=ppt/notesSlides/notesSlide1.xml><?xml version="1.0" encoding="utf-8"?>
-<p:notes xmlns:a="http://schemas.openxmlformats.org/drawingml/2006/main" xmlns:p="http://schemas.openxmlformats.org/presentationml/2006/main" xmlns:r="http://schemas.openxmlformats.org/officeDocument/2006/relationships">
-  <p:cSld>
-    <p:spTree>
-      <p:nvGrpSpPr>
-        <p:cNvPr id="1" name=""/>
-        <p:cNvGrpSpPr/>
-        <p:nvPr/>
-      </p:nvGrpSpPr>
-      <p:grpSpPr>
-        <a:xfrm>
-          <a:off x="0" y="0"/>
-          <a:ext cx="0" cy="0"/>
-          <a:chOff x="0" y="0"/>
-          <a:chExt cx="0" cy="0"/>
-        </a:xfrm>
-      </p:grpSpPr>
-      <p:sp>
-        <p:nvSpPr>
-          <p:cNvPr id="2" name="Slide Image Placeholder 1"/>
-          <p:cNvSpPr>
-            <a:spLocks noGrp="1"/>
-          </p:cNvSpPr>
-          <p:nvPr>
-            <p:ph type="sldImg" idx="2"/>
-          </p:nvPr>
-        </p:nvSpPr>
-        <p:spPr/>
-      </p:sp>
-      <p:sp>
-        <p:nvSpPr>
-          <p:cNvPr id="3" name="Notes Placeholder 2"/>
-          <p:cNvSpPr>
-            <a:spLocks noGrp="1"/>
-          </p:cNvSpPr>
-          <p:nvPr>
-            <p:ph type="body" idx="3" sz="quarter"/>
-          </p:nvPr>
-        </p:nvSpPr>
-        <p:spPr/>
-        <p:txBody>
-          <a:bodyPr/>
-          <a:lstStyle/>
-          <a:p>
-            <a:r>
-              <a:t>3 minutos. Sin apuntes. Es para recordar, no cuenta para nota.</a:t>
-            </a:r>
-          </a:p>
-        </p:txBody>
-      </p:sp>
-      <p:sp>
-        <p:nvSpPr>
-          <p:cNvPr id="4" name="Slide Number Placeholder 3"/>
-          <p:cNvSpPr>
-            <a:spLocks noGrp="1"/>
-          </p:cNvSpPr>
-          <p:nvPr>
-            <p:ph type="sldNum" idx="5" sz="quarter"/>
-          </p:nvPr>
-        </p:nvSpPr>
-        <p:spPr/>
-      </p:sp>
-    </p:spTree>
-  </p:cSld>
-  <p:clrMapOvr>
-    <a:masterClrMapping/>
-  </p:clrMapOvr>
-</p:notes>
-</file>
-
-<file path=ppt/notesSlides/notesSlide2.xml><?xml version="1.0" encoding="utf-8"?>
-<p:notes xmlns:a="http://schemas.openxmlformats.org/drawingml/2006/main" xmlns:p="http://schemas.openxmlformats.org/presentationml/2006/main" xmlns:r="http://schemas.openxmlformats.org/officeDocument/2006/relationships">
-  <p:cSld>
-    <p:spTree>
-      <p:nvGrpSpPr>
-        <p:cNvPr id="1" name=""/>
-        <p:cNvGrpSpPr/>
-        <p:nvPr/>
-      </p:nvGrpSpPr>
-      <p:grpSpPr>
-        <a:xfrm>
-          <a:off x="0" y="0"/>
-          <a:ext cx="0" cy="0"/>
-          <a:chOff x="0" y="0"/>
-          <a:chExt cx="0" cy="0"/>
-        </a:xfrm>
-      </p:grpSpPr>
-      <p:sp>
-        <p:nvSpPr>
-          <p:cNvPr id="2" name="Slide Image Placeholder 1"/>
-          <p:cNvSpPr>
-            <a:spLocks noGrp="1"/>
-          </p:cNvSpPr>
-          <p:nvPr>
-            <p:ph type="sldImg" idx="2"/>
-          </p:nvPr>
-        </p:nvSpPr>
-        <p:spPr/>
-      </p:sp>
-      <p:sp>
-        <p:nvSpPr>
-          <p:cNvPr id="3" name="Notes Placeholder 2"/>
-          <p:cNvSpPr>
-            <a:spLocks noGrp="1"/>
-          </p:cNvSpPr>
-          <p:nvPr>
-            <p:ph type="body" idx="3" sz="quarter"/>
-          </p:nvPr>
-        </p:nvSpPr>
-        <p:spPr/>
-        <p:txBody>
-          <a:bodyPr/>
-          <a:lstStyle/>
-          <a:p>
-            <a:r>
-              <a:t>3 minutos. Sin apuntes. Es para recordar, no cuenta para nota.</a:t>
-            </a:r>
-          </a:p>
-        </p:txBody>
-      </p:sp>
-      <p:sp>
-        <p:nvSpPr>
-          <p:cNvPr id="4" name="Slide Number Placeholder 3"/>
-          <p:cNvSpPr>
-            <a:spLocks noGrp="1"/>
-          </p:cNvSpPr>
-          <p:nvPr>
-            <p:ph type="sldNum" idx="5" sz="quarter"/>
-          </p:nvPr>
-        </p:nvSpPr>
-        <p:spPr/>
-      </p:sp>
-    </p:spTree>
-  </p:cSld>
-  <p:clrMapOvr>
-    <a:masterClrMapping/>
-  </p:clrMapOvr>
-</p:notes>
-</file>
-
-<file path=ppt/notesSlides/notesSlide3.xml><?xml version="1.0" encoding="utf-8"?>
-<p:notes xmlns:a="http://schemas.openxmlformats.org/drawingml/2006/main" xmlns:p="http://schemas.openxmlformats.org/presentationml/2006/main" xmlns:r="http://schemas.openxmlformats.org/officeDocument/2006/relationships">
-  <p:cSld>
-    <p:spTree>
-      <p:nvGrpSpPr>
-        <p:cNvPr id="1" name=""/>
-        <p:cNvGrpSpPr/>
-        <p:nvPr/>
-      </p:nvGrpSpPr>
-      <p:grpSpPr>
-        <a:xfrm>
-          <a:off x="0" y="0"/>
-          <a:ext cx="0" cy="0"/>
-          <a:chOff x="0" y="0"/>
-          <a:chExt cx="0" cy="0"/>
-        </a:xfrm>
-      </p:grpSpPr>
-      <p:sp>
-        <p:nvSpPr>
-          <p:cNvPr id="2" name="Slide Image Placeholder 1"/>
-          <p:cNvSpPr>
-            <a:spLocks noGrp="1"/>
-          </p:cNvSpPr>
-          <p:nvPr>
-            <p:ph type="sldImg" idx="2"/>
-          </p:nvPr>
-        </p:nvSpPr>
-        <p:spPr/>
-      </p:sp>
-      <p:sp>
-        <p:nvSpPr>
-          <p:cNvPr id="3" name="Notes Placeholder 2"/>
-          <p:cNvSpPr>
-            <a:spLocks noGrp="1"/>
-          </p:cNvSpPr>
-          <p:nvPr>
-            <p:ph type="body" idx="3" sz="quarter"/>
-          </p:nvPr>
-        </p:nvSpPr>
-        <p:spPr/>
-        <p:txBody>
-          <a:bodyPr/>
-          <a:lstStyle/>
-          <a:p>
-            <a:r>
-              <a:t>Nadie tiene que contestar: solo pensarlo.</a:t>
-            </a:r>
-          </a:p>
-        </p:txBody>
-      </p:sp>
-      <p:sp>
-        <p:nvSpPr>
-          <p:cNvPr id="4" name="Slide Number Placeholder 3"/>
-          <p:cNvSpPr>
-            <a:spLocks noGrp="1"/>
-          </p:cNvSpPr>
-          <p:nvPr>
-            <p:ph type="sldNum" idx="5" sz="quarter"/>
-          </p:nvPr>
-        </p:nvSpPr>
-        <p:spPr/>
-      </p:sp>
-    </p:spTree>
-  </p:cSld>
-  <p:clrMapOvr>
-    <a:masterClrMapping/>
-  </p:clrMapOvr>
-</p:notes>
-</file>
-
-<file path=ppt/notesSlides/notesSlide4.xml><?xml version="1.0" encoding="utf-8"?>
-<p:notes xmlns:a="http://schemas.openxmlformats.org/drawingml/2006/main" xmlns:p="http://schemas.openxmlformats.org/presentationml/2006/main" xmlns:r="http://schemas.openxmlformats.org/officeDocument/2006/relationships">
-  <p:cSld>
-    <p:spTree>
-      <p:nvGrpSpPr>
-        <p:cNvPr id="1" name=""/>
-        <p:cNvGrpSpPr/>
-        <p:nvPr/>
-      </p:nvGrpSpPr>
-      <p:grpSpPr>
-        <a:xfrm>
-          <a:off x="0" y="0"/>
-          <a:ext cx="0" cy="0"/>
-          <a:chOff x="0" y="0"/>
-          <a:chExt cx="0" cy="0"/>
-        </a:xfrm>
-      </p:grpSpPr>
-      <p:sp>
-        <p:nvSpPr>
-          <p:cNvPr id="2" name="Slide Image Placeholder 1"/>
-          <p:cNvSpPr>
-            <a:spLocks noGrp="1"/>
-          </p:cNvSpPr>
-          <p:nvPr>
-            <p:ph type="sldImg" idx="2"/>
-          </p:nvPr>
-        </p:nvSpPr>
-        <p:spPr/>
-      </p:sp>
-      <p:sp>
-        <p:nvSpPr>
-          <p:cNvPr id="3" name="Notes Placeholder 2"/>
-          <p:cNvSpPr>
-            <a:spLocks noGrp="1"/>
-          </p:cNvSpPr>
-          <p:nvPr>
-            <p:ph type="body" idx="3" sz="quarter"/>
-          </p:nvPr>
-        </p:nvSpPr>
-        <p:spPr/>
-        <p:txBody>
-          <a:bodyPr/>
-          <a:lstStyle/>
-          <a:p>
-            <a:r>
-              <a:t>Dejar unos segundos para que piensen la respuesta fácil antes de enseñar los pasos.</a:t>
-            </a:r>
-          </a:p>
-        </p:txBody>
-      </p:sp>
-      <p:sp>
-        <p:nvSpPr>
-          <p:cNvPr id="4" name="Slide Number Placeholder 3"/>
-          <p:cNvSpPr>
-            <a:spLocks noGrp="1"/>
-          </p:cNvSpPr>
-          <p:nvPr>
-            <p:ph type="sldNum" idx="5" sz="quarter"/>
-          </p:nvPr>
-        </p:nvSpPr>
-        <p:spPr/>
-      </p:sp>
-    </p:spTree>
-  </p:cSld>
-  <p:clrMapOvr>
-    <a:masterClrMapping/>
-  </p:clrMapOvr>
-</p:notes>
-</file>
-
-<file path=ppt/notesSlides/notesSlide5.xml><?xml version="1.0" encoding="utf-8"?>
-<p:notes xmlns:a="http://schemas.openxmlformats.org/drawingml/2006/main" xmlns:p="http://schemas.openxmlformats.org/presentationml/2006/main" xmlns:r="http://schemas.openxmlformats.org/officeDocument/2006/relationships">
-  <p:cSld>
-    <p:spTree>
-      <p:nvGrpSpPr>
-        <p:cNvPr id="1" name=""/>
-        <p:cNvGrpSpPr/>
-        <p:nvPr/>
-      </p:nvGrpSpPr>
-      <p:grpSpPr>
-        <a:xfrm>
-          <a:off x="0" y="0"/>
-          <a:ext cx="0" cy="0"/>
-          <a:chOff x="0" y="0"/>
-          <a:chExt cx="0" cy="0"/>
-        </a:xfrm>
-      </p:grpSpPr>
-      <p:sp>
-        <p:nvSpPr>
-          <p:cNvPr id="2" name="Slide Image Placeholder 1"/>
-          <p:cNvSpPr>
-            <a:spLocks noGrp="1"/>
-          </p:cNvSpPr>
-          <p:nvPr>
-            <p:ph type="sldImg" idx="2"/>
-          </p:nvPr>
-        </p:nvSpPr>
-        <p:spPr/>
-      </p:sp>
-      <p:sp>
-        <p:nvSpPr>
-          <p:cNvPr id="3" name="Notes Placeholder 2"/>
-          <p:cNvSpPr>
-            <a:spLocks noGrp="1"/>
-          </p:cNvSpPr>
-          <p:nvPr>
-            <p:ph type="body" idx="3" sz="quarter"/>
-          </p:nvPr>
-        </p:nvSpPr>
-        <p:spPr/>
-        <p:txBody>
-          <a:bodyPr/>
-          <a:lstStyle/>
-          <a:p>
-            <a:r>
-              <a:t>Dejar 2 minutos para que lo escriban. La diapositiva siguiente muestra el resumen.</a:t>
-            </a:r>
-          </a:p>
-        </p:txBody>
-      </p:sp>
-      <p:sp>
-        <p:nvSpPr>
-          <p:cNvPr id="4" name="Slide Number Placeholder 3"/>
-          <p:cNvSpPr>
-            <a:spLocks noGrp="1"/>
-          </p:cNvSpPr>
-          <p:nvPr>
-            <p:ph type="sldNum" idx="5" sz="quarter"/>
-          </p:nvPr>
-        </p:nvSpPr>
-        <p:spPr/>
-      </p:sp>
-    </p:spTree>
-  </p:cSld>
-  <p:clrMapOvr>
-    <a:masterClrMapping/>
-  </p:clrMapOvr>
-</p:notes>
 </file>
 
 <file path=ppt/slideLayouts/slideLayout1.xml><?xml version="1.0" encoding="utf-8"?>

--- a/curso/pptx/S18.pptx
+++ b/curso/pptx/S18.pptx
@@ -6645,7 +6645,7 @@
                           </a:solidFill>
                           <a:latin typeface="Nunito Sans"/>
                         </a:rPr>
-                        <a:t>Ataque a la persona (ad hominem)</a:t>
+                        <a:t>Ataque a la persona</a:t>
                       </a:r>
                     </a:p>
                   </a:txBody>
@@ -6713,7 +6713,7 @@
                           </a:solidFill>
                           <a:latin typeface="Nunito Sans"/>
                         </a:rPr>
-                        <a:t>«Tú también» (tu quoque)</a:t>
+                        <a:t>«Tú también»</a:t>
                       </a:r>
                     </a:p>
                   </a:txBody>
@@ -7048,7 +7048,7 @@
                           </a:solidFill>
                           <a:latin typeface="Nunito Sans"/>
                         </a:rPr>
-                        <a:t>Apelación al miedo (ad metum)</a:t>
+                        <a:t>Apelación al miedo</a:t>
                       </a:r>
                     </a:p>
                   </a:txBody>
@@ -7116,7 +7116,7 @@
                           </a:solidFill>
                           <a:latin typeface="Nunito Sans"/>
                         </a:rPr>
-                        <a:t>Apelación a la pena (ad misericordiam)</a:t>
+                        <a:t>Apelación a la pena</a:t>
                       </a:r>
                     </a:p>
                   </a:txBody>

--- a/curso/pptx/S18.pptx
+++ b/curso/pptx/S18.pptx
@@ -3534,7 +3534,7 @@
                 </a:solidFill>
                 <a:latin typeface="Nunito Sans"/>
               </a:rPr>
-              <a:t>PENSAMIENTO CRÍTICO · SESIÓN 18 · UNIDAD 3 · FALACIAS I: ATACAR, DESVIAR, EMOCIONAR</a:t>
+              <a:t>PENSAMIENTO CRÍTICO · SESIÓN 18 · UNIDAD 3 · ARGUMENTAR</a:t>
             </a:r>
           </a:p>
         </p:txBody>
@@ -3612,7 +3612,7 @@
                 </a:solidFill>
                 <a:latin typeface="Nunito Sans"/>
               </a:rPr>
-              <a:t>Repasamos qué es una falacia y las que atacan a la persona, deforman la idea, desvían el tema o usan emociones.</a:t>
+              <a:t>Repasamos la unidad: qué es un argumento, cómo reconstruirlo, las tres preguntas, deducción e inducción, y contraejemplos y analogías.</a:t>
             </a:r>
           </a:p>
         </p:txBody>
@@ -3716,161 +3716,221 @@
                 </a:solidFill>
                 <a:latin typeface="Fredoka"/>
               </a:rPr>
-              <a:t>Cómo analizar una frase sospechosa</a:t>
-            </a:r>
-          </a:p>
-        </p:txBody>
-      </p:sp>
-      <p:sp>
-        <p:nvSpPr>
-          <p:cNvPr id="4" name="TextBox 3"/>
-          <p:cNvSpPr txBox="1"/>
+              <a:t>Sesión 17 · Ejemplos, contraejemplos y analogías</a:t>
+            </a:r>
+          </a:p>
+        </p:txBody>
+      </p:sp>
+      <p:graphicFrame>
+        <p:nvGraphicFramePr>
+          <p:cNvPr id="4" name="Table 3"/>
+          <p:cNvGraphicFramePr>
+            <a:graphicFrameLocks noGrp="1"/>
+          </p:cNvGraphicFramePr>
           <p:nvPr/>
-        </p:nvSpPr>
-        <p:spPr>
-          <a:xfrm>
-            <a:off x="640000" y="1650000"/>
-            <a:ext cx="10912000" cy="4808000"/>
-          </a:xfrm>
-          <a:prstGeom prst="rect">
-            <a:avLst/>
-          </a:prstGeom>
-          <a:noFill/>
-        </p:spPr>
-        <p:txBody>
-          <a:bodyPr wrap="square">
-            <a:spAutoFit/>
-          </a:bodyPr>
-          <a:lstStyle/>
-          <a:p>
-            <a:pPr>
-              <a:spcAft>
-                <a:spcPts val="1260"/>
-              </a:spcAft>
-            </a:pPr>
-            <a:r>
-              <a:rPr sz="2800" b="1">
-                <a:solidFill>
-                  <a:srgbClr val="E8793A"/>
-                </a:solidFill>
-                <a:latin typeface="Nunito Sans"/>
-              </a:rPr>
-              <a:t>• </a:t>
-            </a:r>
-            <a:r>
-              <a:rPr sz="2800" b="0">
-                <a:solidFill>
-                  <a:srgbClr val="1F2A44"/>
-                </a:solidFill>
-                <a:latin typeface="Nunito Sans"/>
-              </a:rPr>
-              <a:t>1. ¿Qué me piden creer o hacer?</a:t>
-            </a:r>
-          </a:p>
-          <a:p>
-            <a:pPr>
-              <a:spcAft>
-                <a:spcPts val="1260"/>
-              </a:spcAft>
-            </a:pPr>
-            <a:r>
-              <a:rPr sz="2800" b="1">
-                <a:solidFill>
-                  <a:srgbClr val="E8793A"/>
-                </a:solidFill>
-                <a:latin typeface="Nunito Sans"/>
-              </a:rPr>
-              <a:t>• </a:t>
-            </a:r>
-            <a:r>
-              <a:rPr sz="2800" b="0">
-                <a:solidFill>
-                  <a:srgbClr val="1F2A44"/>
-                </a:solidFill>
-                <a:latin typeface="Nunito Sans"/>
-              </a:rPr>
-              <a:t>2. ¿Qué razón me dan?</a:t>
-            </a:r>
-          </a:p>
-          <a:p>
-            <a:pPr>
-              <a:spcAft>
-                <a:spcPts val="1260"/>
-              </a:spcAft>
-            </a:pPr>
-            <a:r>
-              <a:rPr sz="2800" b="1">
-                <a:solidFill>
-                  <a:srgbClr val="E8793A"/>
-                </a:solidFill>
-                <a:latin typeface="Nunito Sans"/>
-              </a:rPr>
-              <a:t>• </a:t>
-            </a:r>
-            <a:r>
-              <a:rPr sz="2800" b="0">
-                <a:solidFill>
-                  <a:srgbClr val="1F2A44"/>
-                </a:solidFill>
-                <a:latin typeface="Nunito Sans"/>
-              </a:rPr>
-              <a:t>3. ¿Viene a cuento? ¿Habla de la idea o de otra cosa?</a:t>
-            </a:r>
-          </a:p>
-          <a:p>
-            <a:pPr>
-              <a:spcAft>
-                <a:spcPts val="1260"/>
-              </a:spcAft>
-            </a:pPr>
-            <a:r>
-              <a:rPr sz="2800" b="1">
-                <a:solidFill>
-                  <a:srgbClr val="E8793A"/>
-                </a:solidFill>
-                <a:latin typeface="Nunito Sans"/>
-              </a:rPr>
-              <a:t>• </a:t>
-            </a:r>
-            <a:r>
-              <a:rPr sz="2800" b="0">
-                <a:solidFill>
-                  <a:srgbClr val="1F2A44"/>
-                </a:solidFill>
-                <a:latin typeface="Nunito Sans"/>
-              </a:rPr>
-              <a:t>4. Si es un truco, ponle </a:t>
-            </a:r>
-            <a:r>
-              <a:rPr sz="2800" b="1">
-                <a:solidFill>
-                  <a:srgbClr val="1F2A44"/>
-                </a:solidFill>
-                <a:latin typeface="Nunito Sans"/>
-              </a:rPr>
-              <a:t>nombre</a:t>
-            </a:r>
-            <a:r>
-              <a:rPr sz="2800" b="0">
-                <a:solidFill>
-                  <a:srgbClr val="1F2A44"/>
-                </a:solidFill>
-                <a:latin typeface="Nunito Sans"/>
-              </a:rPr>
-              <a:t> y hazle su </a:t>
-            </a:r>
-            <a:r>
-              <a:rPr sz="2800" b="1">
-                <a:solidFill>
-                  <a:srgbClr val="1F2A44"/>
-                </a:solidFill>
-                <a:latin typeface="Nunito Sans"/>
-              </a:rPr>
-              <a:t>pregunta</a:t>
-            </a:r>
-          </a:p>
-        </p:txBody>
-      </p:sp>
+        </p:nvGraphicFramePr>
+        <p:xfrm>
+          <a:off x="640000" y="1700000"/>
+          <a:ext cx="10912000" cy="2400000"/>
+        </p:xfrm>
+        <a:graphic>
+          <a:graphicData uri="http://schemas.openxmlformats.org/drawingml/2006/table">
+            <a:tbl>
+              <a:tblPr firstRow="1" bandRow="1">
+                <a:tableStyleId>{5C22544A-7EE6-4342-B048-85BDC9FD1C3A}</a:tableStyleId>
+              </a:tblPr>
+              <a:tblGrid>
+                <a:gridCol w="5456000"/>
+                <a:gridCol w="5456000"/>
+              </a:tblGrid>
+              <a:tr h="600000">
+                <a:tc>
+                  <a:txBody>
+                    <a:bodyPr/>
+                    <a:lstStyle/>
+                    <a:p>
+                      <a:r>
+                        <a:rPr sz="2000" b="1">
+                          <a:solidFill>
+                            <a:srgbClr val="FBF7EF"/>
+                          </a:solidFill>
+                          <a:latin typeface="Fredoka"/>
+                        </a:rPr>
+                        <a:t>Herramienta</a:t>
+                      </a:r>
+                    </a:p>
+                  </a:txBody>
+                  <a:tcPr>
+                    <a:solidFill>
+                      <a:srgbClr val="1F2A44"/>
+                    </a:solidFill>
+                  </a:tcPr>
+                </a:tc>
+                <a:tc>
+                  <a:txBody>
+                    <a:bodyPr/>
+                    <a:lstStyle/>
+                    <a:p>
+                      <a:r>
+                        <a:rPr sz="2000" b="1">
+                          <a:solidFill>
+                            <a:srgbClr val="FBF7EF"/>
+                          </a:solidFill>
+                          <a:latin typeface="Fredoka"/>
+                        </a:rPr>
+                        <a:t>Qué hace</a:t>
+                      </a:r>
+                    </a:p>
+                  </a:txBody>
+                  <a:tcPr>
+                    <a:solidFill>
+                      <a:srgbClr val="1F2A44"/>
+                    </a:solidFill>
+                  </a:tcPr>
+                </a:tc>
+              </a:tr>
+              <a:tr h="600000">
+                <a:tc>
+                  <a:txBody>
+                    <a:bodyPr/>
+                    <a:lstStyle/>
+                    <a:p>
+                      <a:r>
+                        <a:rPr sz="2000" b="1">
+                          <a:solidFill>
+                            <a:srgbClr val="1F2A44"/>
+                          </a:solidFill>
+                          <a:latin typeface="Nunito Sans"/>
+                        </a:rPr>
+                        <a:t>Ejemplo</a:t>
+                      </a:r>
+                    </a:p>
+                  </a:txBody>
+                  <a:tcPr>
+                    <a:solidFill>
+                      <a:srgbClr val="FFFFFF"/>
+                    </a:solidFill>
+                  </a:tcPr>
+                </a:tc>
+                <a:tc>
+                  <a:txBody>
+                    <a:bodyPr/>
+                    <a:lstStyle/>
+                    <a:p>
+                      <a:r>
+                        <a:rPr sz="2000" b="0">
+                          <a:solidFill>
+                            <a:srgbClr val="1F2A44"/>
+                          </a:solidFill>
+                          <a:latin typeface="Nunito Sans"/>
+                        </a:rPr>
+                        <a:t>Apoya una idea, pero no demuestra un «todos»</a:t>
+                      </a:r>
+                    </a:p>
+                  </a:txBody>
+                  <a:tcPr>
+                    <a:solidFill>
+                      <a:srgbClr val="FFFFFF"/>
+                    </a:solidFill>
+                  </a:tcPr>
+                </a:tc>
+              </a:tr>
+              <a:tr h="600000">
+                <a:tc>
+                  <a:txBody>
+                    <a:bodyPr/>
+                    <a:lstStyle/>
+                    <a:p>
+                      <a:r>
+                        <a:rPr sz="2000" b="1">
+                          <a:solidFill>
+                            <a:srgbClr val="1F2A44"/>
+                          </a:solidFill>
+                          <a:latin typeface="Nunito Sans"/>
+                        </a:rPr>
+                        <a:t>Contraejemplo</a:t>
+                      </a:r>
+                    </a:p>
+                  </a:txBody>
+                  <a:tcPr>
+                    <a:solidFill>
+                      <a:srgbClr val="EAF0F7"/>
+                    </a:solidFill>
+                  </a:tcPr>
+                </a:tc>
+                <a:tc>
+                  <a:txBody>
+                    <a:bodyPr/>
+                    <a:lstStyle/>
+                    <a:p>
+                      <a:r>
+                        <a:rPr sz="2000" b="0">
+                          <a:solidFill>
+                            <a:srgbClr val="1F2A44"/>
+                          </a:solidFill>
+                          <a:latin typeface="Nunito Sans"/>
+                        </a:rPr>
+                        <a:t>Va en contra: basta uno para tumbar un «todos»</a:t>
+                      </a:r>
+                    </a:p>
+                  </a:txBody>
+                  <a:tcPr>
+                    <a:solidFill>
+                      <a:srgbClr val="EAF0F7"/>
+                    </a:solidFill>
+                  </a:tcPr>
+                </a:tc>
+              </a:tr>
+              <a:tr h="600000">
+                <a:tc>
+                  <a:txBody>
+                    <a:bodyPr/>
+                    <a:lstStyle/>
+                    <a:p>
+                      <a:r>
+                        <a:rPr sz="2000" b="1">
+                          <a:solidFill>
+                            <a:srgbClr val="1F2A44"/>
+                          </a:solidFill>
+                          <a:latin typeface="Nunito Sans"/>
+                        </a:rPr>
+                        <a:t>Analogía</a:t>
+                      </a:r>
+                    </a:p>
+                  </a:txBody>
+                  <a:tcPr>
+                    <a:solidFill>
+                      <a:srgbClr val="FFFFFF"/>
+                    </a:solidFill>
+                  </a:tcPr>
+                </a:tc>
+                <a:tc>
+                  <a:txBody>
+                    <a:bodyPr/>
+                    <a:lstStyle/>
+                    <a:p>
+                      <a:r>
+                        <a:rPr sz="2000" b="0">
+                          <a:solidFill>
+                            <a:srgbClr val="1F2A44"/>
+                          </a:solidFill>
+                          <a:latin typeface="Nunito Sans"/>
+                        </a:rPr>
+                        <a:t>Compara: es buena si se parecen en lo que importa</a:t>
+                      </a:r>
+                    </a:p>
+                  </a:txBody>
+                  <a:tcPr>
+                    <a:solidFill>
+                      <a:srgbClr val="FFFFFF"/>
+                    </a:solidFill>
+                  </a:tcPr>
+                </a:tc>
+              </a:tr>
+            </a:tbl>
+          </a:graphicData>
+        </a:graphic>
+      </p:graphicFrame>
     </p:spTree>
   </p:cSld>
   <p:clrMapOvr>
@@ -3970,7 +4030,7 @@
                 </a:solidFill>
                 <a:latin typeface="Fredoka"/>
               </a:rPr>
-              <a:t>Caso resuelto</a:t>
+              <a:t>Un caso con todo</a:t>
             </a:r>
           </a:p>
         </p:txBody>
@@ -4035,7 +4095,7 @@
                 </a:solidFill>
                 <a:latin typeface="Nunito Sans"/>
               </a:rPr>
-              <a:t>BLOQUE 2 · CASO RESUELTO</a:t>
+              <a:t>BLOQUE 2 · UN CASO CON TODO</a:t>
             </a:r>
           </a:p>
         </p:txBody>
@@ -4074,7 +4134,7 @@
                 </a:solidFill>
                 <a:latin typeface="Fredoka"/>
               </a:rPr>
-              <a:t>Tres trucos en tres frases</a:t>
+              <a:t>El móvil en clase</a:t>
             </a:r>
           </a:p>
         </p:txBody>
@@ -4156,7 +4216,7 @@
                 </a:solidFill>
                 <a:latin typeface="Nunito Sans"/>
               </a:rPr>
-              <a:t>«Tú no opinas, que siempre llegas tarde. Además, si no me das la razón, te quedas sin amigos. Y, por cierto, ¿has visto el partido?»</a:t>
+              <a:t>«Nadie aprende nada con el móvil en clase: mi hermano lo usa y lo suspende todo. Por tanto, hay que prohibir los móviles en todos los institutos.»</a:t>
             </a:r>
           </a:p>
         </p:txBody>
@@ -4204,7 +4264,7 @@
                 </a:solidFill>
                 <a:latin typeface="Nunito Sans"/>
               </a:rPr>
-              <a:t>«Siempre llegas tarde»: ataca a la persona, no a su opinión.</a:t>
+              <a:t>C: hay que prohibir los móviles en todos los institutos. P: nadie aprende con el móvil; mi hermano suspende.</a:t>
             </a:r>
           </a:p>
           <a:p>
@@ -4229,7 +4289,7 @@
                 </a:solidFill>
                 <a:latin typeface="Nunito Sans"/>
               </a:rPr>
-              <a:t>«Te quedas sin amigos»: apelación al miedo, sin pruebas.</a:t>
+              <a:t>¿Es suficiente? El hermano es un solo caso: una inducción muy débil.</a:t>
             </a:r>
           </a:p>
           <a:p>
@@ -4254,7 +4314,7 @@
                 </a:solidFill>
                 <a:latin typeface="Nunito Sans"/>
               </a:rPr>
-              <a:t>«¿Has visto el partido?»: pista falsa, cambia de tema.</a:t>
+              <a:t>¿Es verdad «nadie aprende»? Un contraejemplo la tumba: alguien que usa el móvil como diccionario y aprende.</a:t>
             </a:r>
           </a:p>
           <a:p>
@@ -4279,7 +4339,7 @@
                 </a:solidFill>
                 <a:latin typeface="Nunito Sans"/>
               </a:rPr>
-              <a:t>Conclusión: tres falacias y ninguna razón. La opinión del otro sigue sin respuesta.</a:t>
+              <a:t>Conclusión: la idea se puede defender, pero estas razones no son suficientes.</a:t>
             </a:r>
           </a:p>
         </p:txBody>
@@ -4344,7 +4404,7 @@
                 </a:solidFill>
                 <a:latin typeface="Nunito Sans"/>
               </a:rPr>
-              <a:t>CASO TRAMPA · BLOQUE 2 · CASO RESUELTO</a:t>
+              <a:t>CASO TRAMPA · BLOQUE 2 · UN CASO CON TODO</a:t>
             </a:r>
           </a:p>
         </p:txBody>
@@ -4383,7 +4443,7 @@
                 </a:solidFill>
                 <a:latin typeface="Fredoka"/>
               </a:rPr>
-              <a:t>⚠ Miedo y prisa: ¿siempre falacia?</a:t>
+              <a:t>⚠ Una deducción que falla</a:t>
             </a:r>
           </a:p>
         </p:txBody>
@@ -4465,7 +4525,7 @@
                 </a:solidFill>
                 <a:latin typeface="Nunito Sans"/>
               </a:rPr>
-              <a:t>Suena la alarma de incendios. La profesora: «¡Salid ya, en fila, sin coger las mochilas!».</a:t>
+              <a:t>«Todos los peces pueden vivir fuera del agua. El salmón es un pez. Por tanto, el salmón puede vivir fuera del agua.»</a:t>
             </a:r>
           </a:p>
         </p:txBody>
@@ -4513,7 +4573,7 @@
                 </a:solidFill>
                 <a:latin typeface="Nunito Sans"/>
               </a:rPr>
-              <a:t>Mete miedo y prisa, como las cadenas de WhatsApp. ¿Es apelación al miedo?</a:t>
+              <a:t>Es una deducción bien hecha. ¿Entonces la conclusión es segura?</a:t>
             </a:r>
           </a:p>
           <a:p>
@@ -4538,7 +4598,7 @@
                 </a:solidFill>
                 <a:latin typeface="Nunito Sans"/>
               </a:rPr>
-              <a:t>Hay miedo y hay prisa: no deja pensar con calma.</a:t>
+              <a:t>La forma es buena: si las premisas fueran verdad, la conclusión también lo sería.</a:t>
             </a:r>
           </a:p>
           <a:p>
@@ -4563,7 +4623,7 @@
                 </a:solidFill>
                 <a:latin typeface="Nunito Sans"/>
               </a:rPr>
-              <a:t>Pero el peligro es real, o puede serlo: la alarma es la señal.</a:t>
+              <a:t>Pero hago la primera pregunta de una buena razón: ¿es verdad? P1 es falsa.</a:t>
             </a:r>
           </a:p>
           <a:p>
@@ -4588,7 +4648,7 @@
                 </a:solidFill>
                 <a:latin typeface="Nunito Sans"/>
               </a:rPr>
-              <a:t>Aquí pararse a discutir sería lo peligroso. Ya se comprobará después.</a:t>
+              <a:t>Con una premisa falsa, la deducción no asegura nada, aunque esté bien hecha.</a:t>
             </a:r>
           </a:p>
           <a:p>
@@ -4613,7 +4673,25 @@
                 </a:solidFill>
                 <a:latin typeface="Nunito Sans"/>
               </a:rPr>
-              <a:t>Conclusión: no es falacia. Mira si el peligro es real, no solo si da miedo.</a:t>
+              <a:t>Conclusión: una deducción asegura la conclusión solo si está bien hecha </a:t>
+            </a:r>
+            <a:r>
+              <a:rPr sz="2400" b="1">
+                <a:solidFill>
+                  <a:srgbClr val="1F2A44"/>
+                </a:solidFill>
+                <a:latin typeface="Nunito Sans"/>
+              </a:rPr>
+              <a:t>y</a:t>
+            </a:r>
+            <a:r>
+              <a:rPr sz="2400" b="0">
+                <a:solidFill>
+                  <a:srgbClr val="1F2A44"/>
+                </a:solidFill>
+                <a:latin typeface="Nunito Sans"/>
+              </a:rPr>
+              <a:t> sus premisas son verdad.</a:t>
             </a:r>
           </a:p>
         </p:txBody>
@@ -4869,7 +4947,7 @@
                 </a:solidFill>
                 <a:latin typeface="Nunito Sans"/>
               </a:rPr>
-              <a:t>Una falacia parece un buen argumento, pero sus razones no sostienen la conclusión.</a:t>
+              <a:t>Un argumento es una conclusión apoyada en premisas; a veces hay premisas ocultas.</a:t>
             </a:r>
           </a:p>
           <a:p>
@@ -4894,7 +4972,7 @@
                 </a:solidFill>
                 <a:latin typeface="Nunito Sans"/>
               </a:rPr>
-              <a:t>Las de esta unidad atacan a la persona, deforman la idea, desvían o emocionan.</a:t>
+              <a:t>Una buena razón es verdad, viene a cuento y es suficiente.</a:t>
             </a:r>
           </a:p>
           <a:p>
@@ -4919,7 +4997,7 @@
                 </a:solidFill>
                 <a:latin typeface="Nunito Sans"/>
               </a:rPr>
-              <a:t>Cada falacia tiene una pregunta que la desmonta.</a:t>
+              <a:t>La deducción bien hecha asegura; la inducción hace probable; un contraejemplo tumba un «todos».</a:t>
             </a:r>
           </a:p>
         </p:txBody>
@@ -5577,7 +5655,7 @@
                 </a:solidFill>
                 <a:latin typeface="Nunito Sans"/>
               </a:rPr>
-              <a:t>La pista falsa consiste en cambiar de ______ para no responder.  (sesión 17)</a:t>
+              <a:t>Una analogía ______ dos cosas parecidas.  (sesión 17)</a:t>
             </a:r>
           </a:p>
           <a:p>
@@ -5602,7 +5680,7 @@
                 </a:solidFill>
                 <a:latin typeface="Nunito Sans"/>
               </a:rPr>
-              <a:t>Pregunta que la desmonta: ¿qué tiene que ______ esto con lo que hablábamos?  (sesión 17)</a:t>
+              <a:t>Un ______ es un caso que ilustra o apoya una idea.  (sesión 17)</a:t>
             </a:r>
           </a:p>
           <a:p>
@@ -5627,7 +5705,7 @@
                 </a:solidFill>
                 <a:latin typeface="Nunito Sans"/>
               </a:rPr>
-              <a:t>Una falacia es un argumento que ______ bueno, pero no lo es.  (sesión 13)</a:t>
+              <a:t>Las palabras pista como «porque» o «por tanto» se llaman ______.  (sesión 13)</a:t>
             </a:r>
           </a:p>
         </p:txBody>
@@ -5779,7 +5857,7 @@
                 </a:solidFill>
                 <a:latin typeface="Nunito Sans"/>
               </a:rPr>
-              <a:t>La pista falsa consiste en cambiar de </a:t>
+              <a:t>Una analogía </a:t>
             </a:r>
             <a:r>
               <a:rPr sz="2600" b="1">
@@ -5788,7 +5866,7 @@
                 </a:solidFill>
                 <a:latin typeface="Nunito Sans"/>
               </a:rPr>
-              <a:t>tema</a:t>
+              <a:t>compara</a:t>
             </a:r>
             <a:r>
               <a:rPr sz="2600" b="0">
@@ -5797,7 +5875,7 @@
                 </a:solidFill>
                 <a:latin typeface="Nunito Sans"/>
               </a:rPr>
-              <a:t> para no responder.  (sesión 17)</a:t>
+              <a:t> dos cosas parecidas.  (sesión 17)</a:t>
             </a:r>
           </a:p>
           <a:p>
@@ -5822,7 +5900,7 @@
                 </a:solidFill>
                 <a:latin typeface="Nunito Sans"/>
               </a:rPr>
-              <a:t>Pregunta que la desmonta: ¿qué tiene que </a:t>
+              <a:t>Un </a:t>
             </a:r>
             <a:r>
               <a:rPr sz="2600" b="1">
@@ -5831,7 +5909,7 @@
                 </a:solidFill>
                 <a:latin typeface="Nunito Sans"/>
               </a:rPr>
-              <a:t>ver</a:t>
+              <a:t>ejemplo</a:t>
             </a:r>
             <a:r>
               <a:rPr sz="2600" b="0">
@@ -5840,7 +5918,7 @@
                 </a:solidFill>
                 <a:latin typeface="Nunito Sans"/>
               </a:rPr>
-              <a:t> esto con lo que hablábamos?  (sesión 17)</a:t>
+              <a:t> es un caso que ilustra o apoya una idea.  (sesión 17)</a:t>
             </a:r>
           </a:p>
           <a:p>
@@ -5865,7 +5943,7 @@
                 </a:solidFill>
                 <a:latin typeface="Nunito Sans"/>
               </a:rPr>
-              <a:t>Una falacia es un argumento que </a:t>
+              <a:t>Las palabras pista como «porque» o «por tanto» se llaman </a:t>
             </a:r>
             <a:r>
               <a:rPr sz="2600" b="1">
@@ -5874,7 +5952,7 @@
                 </a:solidFill>
                 <a:latin typeface="Nunito Sans"/>
               </a:rPr>
-              <a:t>parece</a:t>
+              <a:t>indicadores</a:t>
             </a:r>
             <a:r>
               <a:rPr sz="2600" b="0">
@@ -5883,7 +5961,7 @@
                 </a:solidFill>
                 <a:latin typeface="Nunito Sans"/>
               </a:rPr>
-              <a:t> bueno, pero no lo es.  (sesión 13)</a:t>
+              <a:t>.  (sesión 13)</a:t>
             </a:r>
           </a:p>
         </p:txBody>
@@ -6030,7 +6108,7 @@
                 </a:solidFill>
                 <a:latin typeface="Nunito Sans"/>
               </a:rPr>
-              <a:t>«Tú no opinas, que siempre llegas tarde. Además, si no me das la razón, te quedas sin amigos. Y, por cierto, ¿has visto el partido?»</a:t>
+              <a:t>Un argumento es como una silla: la conclusión es el asiento y las premisas son las patas.</a:t>
             </a:r>
           </a:p>
         </p:txBody>
@@ -6069,7 +6147,7 @@
                 </a:solidFill>
                 <a:latin typeface="Nunito Sans"/>
               </a:rPr>
-              <a:t>¿Cuántos trucos encuentras en estas tres frases?</a:t>
+              <a:t>¿Qué pasa si una pata está rota, o si falta una?</a:t>
             </a:r>
           </a:p>
         </p:txBody>
@@ -6277,7 +6355,7 @@
                 </a:solidFill>
                 <a:latin typeface="Fredoka"/>
               </a:rPr>
-              <a:t>Falacia (sesión 13)</a:t>
+              <a:t>Sesión 13 · ¿Qué es un argumento?</a:t>
             </a:r>
           </a:p>
         </p:txBody>
@@ -6359,7 +6437,43 @@
                 </a:solidFill>
                 <a:latin typeface="Nunito Sans"/>
               </a:rPr>
-              <a:t>Un argumento que parece bueno, pero no lo es: sus razones no sostienen la conclusión.</a:t>
+              <a:t>Un argumento es una </a:t>
+            </a:r>
+            <a:r>
+              <a:rPr sz="2800" b="1">
+                <a:solidFill>
+                  <a:srgbClr val="1F2A44"/>
+                </a:solidFill>
+                <a:latin typeface="Nunito Sans"/>
+              </a:rPr>
+              <a:t>conclusión</a:t>
+            </a:r>
+            <a:r>
+              <a:rPr sz="2800" b="1">
+                <a:solidFill>
+                  <a:srgbClr val="1F2A44"/>
+                </a:solidFill>
+                <a:latin typeface="Nunito Sans"/>
+              </a:rPr>
+              <a:t> apoyada en </a:t>
+            </a:r>
+            <a:r>
+              <a:rPr sz="2800" b="1">
+                <a:solidFill>
+                  <a:srgbClr val="1F2A44"/>
+                </a:solidFill>
+                <a:latin typeface="Nunito Sans"/>
+              </a:rPr>
+              <a:t>premisas</a:t>
+            </a:r>
+            <a:r>
+              <a:rPr sz="2800" b="1">
+                <a:solidFill>
+                  <a:srgbClr val="1F2A44"/>
+                </a:solidFill>
+                <a:latin typeface="Nunito Sans"/>
+              </a:rPr>
+              <a:t> (razones).</a:t>
             </a:r>
           </a:p>
         </p:txBody>
@@ -6407,7 +6521,7 @@
                 </a:solidFill>
                 <a:latin typeface="Nunito Sans"/>
               </a:rPr>
-              <a:t>Suele fallar: ¿viene a cuento? o ¿es suficiente?</a:t>
+              <a:t>Antes de premisa: «porque», «ya que», «como»</a:t>
             </a:r>
           </a:p>
           <a:p>
@@ -6432,7 +6546,32 @@
                 </a:solidFill>
                 <a:latin typeface="Nunito Sans"/>
               </a:rPr>
-              <a:t>Puede tener una conclusión verdadera: falla el camino</a:t>
+              <a:t>Antes de conclusión: «por tanto», «así que», «por eso»</a:t>
+            </a:r>
+          </a:p>
+          <a:p>
+            <a:pPr>
+              <a:spcAft>
+                <a:spcPts val="1260"/>
+              </a:spcAft>
+            </a:pPr>
+            <a:r>
+              <a:rPr sz="2800" b="1">
+                <a:solidFill>
+                  <a:srgbClr val="E8793A"/>
+                </a:solidFill>
+                <a:latin typeface="Nunito Sans"/>
+              </a:rPr>
+              <a:t>• </a:t>
+            </a:r>
+            <a:r>
+              <a:rPr sz="2800" b="0">
+                <a:solidFill>
+                  <a:srgbClr val="1F2A44"/>
+                </a:solidFill>
+                <a:latin typeface="Nunito Sans"/>
+              </a:rPr>
+              <a:t>La conclusión no siempre va al final</a:t>
             </a:r>
           </a:p>
         </p:txBody>
@@ -6536,7 +6675,252 @@
                 </a:solidFill>
                 <a:latin typeface="Fredoka"/>
               </a:rPr>
-              <a:t>Atacar y deformar (sesiones 14 y 15)</a:t>
+              <a:t>Sesión 14 · Reconstruir argumentos</a:t>
+            </a:r>
+          </a:p>
+        </p:txBody>
+      </p:sp>
+      <p:sp>
+        <p:nvSpPr>
+          <p:cNvPr id="4" name="TextBox 3"/>
+          <p:cNvSpPr txBox="1"/>
+          <p:nvPr/>
+        </p:nvSpPr>
+        <p:spPr>
+          <a:xfrm>
+            <a:off x="640000" y="1650000"/>
+            <a:ext cx="10912000" cy="4808000"/>
+          </a:xfrm>
+          <a:prstGeom prst="rect">
+            <a:avLst/>
+          </a:prstGeom>
+          <a:noFill/>
+        </p:spPr>
+        <p:txBody>
+          <a:bodyPr wrap="square">
+            <a:spAutoFit/>
+          </a:bodyPr>
+          <a:lstStyle/>
+          <a:p>
+            <a:pPr>
+              <a:spcAft>
+                <a:spcPts val="1260"/>
+              </a:spcAft>
+            </a:pPr>
+            <a:r>
+              <a:rPr sz="2800" b="1">
+                <a:solidFill>
+                  <a:srgbClr val="E8793A"/>
+                </a:solidFill>
+                <a:latin typeface="Nunito Sans"/>
+              </a:rPr>
+              <a:t>• </a:t>
+            </a:r>
+            <a:r>
+              <a:rPr sz="2800" b="0">
+                <a:solidFill>
+                  <a:srgbClr val="1F2A44"/>
+                </a:solidFill>
+                <a:latin typeface="Nunito Sans"/>
+              </a:rPr>
+              <a:t>1. Busca la conclusión</a:t>
+            </a:r>
+          </a:p>
+          <a:p>
+            <a:pPr>
+              <a:spcAft>
+                <a:spcPts val="1260"/>
+              </a:spcAft>
+            </a:pPr>
+            <a:r>
+              <a:rPr sz="2800" b="1">
+                <a:solidFill>
+                  <a:srgbClr val="E8793A"/>
+                </a:solidFill>
+                <a:latin typeface="Nunito Sans"/>
+              </a:rPr>
+              <a:t>• </a:t>
+            </a:r>
+            <a:r>
+              <a:rPr sz="2800" b="0">
+                <a:solidFill>
+                  <a:srgbClr val="1F2A44"/>
+                </a:solidFill>
+                <a:latin typeface="Nunito Sans"/>
+              </a:rPr>
+              <a:t>2. Busca las premisas</a:t>
+            </a:r>
+          </a:p>
+          <a:p>
+            <a:pPr>
+              <a:spcAft>
+                <a:spcPts val="1260"/>
+              </a:spcAft>
+            </a:pPr>
+            <a:r>
+              <a:rPr sz="2800" b="1">
+                <a:solidFill>
+                  <a:srgbClr val="E8793A"/>
+                </a:solidFill>
+                <a:latin typeface="Nunito Sans"/>
+              </a:rPr>
+              <a:t>• </a:t>
+            </a:r>
+            <a:r>
+              <a:rPr sz="2800" b="0">
+                <a:solidFill>
+                  <a:srgbClr val="1F2A44"/>
+                </a:solidFill>
+                <a:latin typeface="Nunito Sans"/>
+              </a:rPr>
+              <a:t>3. Quita lo que sobra</a:t>
+            </a:r>
+          </a:p>
+          <a:p>
+            <a:pPr>
+              <a:spcAft>
+                <a:spcPts val="1260"/>
+              </a:spcAft>
+            </a:pPr>
+            <a:r>
+              <a:rPr sz="2800" b="1">
+                <a:solidFill>
+                  <a:srgbClr val="E8793A"/>
+                </a:solidFill>
+                <a:latin typeface="Nunito Sans"/>
+              </a:rPr>
+              <a:t>• </a:t>
+            </a:r>
+            <a:r>
+              <a:rPr sz="2800" b="0">
+                <a:solidFill>
+                  <a:srgbClr val="1F2A44"/>
+                </a:solidFill>
+                <a:latin typeface="Nunito Sans"/>
+              </a:rPr>
+              <a:t>4. Busca la </a:t>
+            </a:r>
+            <a:r>
+              <a:rPr sz="2800" b="1">
+                <a:solidFill>
+                  <a:srgbClr val="1F2A44"/>
+                </a:solidFill>
+                <a:latin typeface="Nunito Sans"/>
+              </a:rPr>
+              <a:t>premisa oculta</a:t>
+            </a:r>
+            <a:r>
+              <a:rPr sz="2800" b="0">
+                <a:solidFill>
+                  <a:srgbClr val="1F2A44"/>
+                </a:solidFill>
+                <a:latin typeface="Nunito Sans"/>
+              </a:rPr>
+              <a:t>: la que no se dice, pero hace falta</a:t>
+            </a:r>
+          </a:p>
+        </p:txBody>
+      </p:sp>
+    </p:spTree>
+  </p:cSld>
+  <p:clrMapOvr>
+    <a:masterClrMapping/>
+  </p:clrMapOvr>
+</p:sld>
+</file>
+
+<file path=ppt/slides/slide8.xml><?xml version="1.0" encoding="utf-8"?>
+<p:sld xmlns:a="http://schemas.openxmlformats.org/drawingml/2006/main" xmlns:p="http://schemas.openxmlformats.org/presentationml/2006/main" xmlns:r="http://schemas.openxmlformats.org/officeDocument/2006/relationships">
+  <p:cSld>
+    <p:bg>
+      <p:bgPr>
+        <a:solidFill>
+          <a:srgbClr val="FBF7EF"/>
+        </a:solidFill>
+        <a:effectLst/>
+      </p:bgPr>
+    </p:bg>
+    <p:spTree>
+      <p:nvGrpSpPr>
+        <p:cNvPr id="1" name=""/>
+        <p:cNvGrpSpPr/>
+        <p:nvPr/>
+      </p:nvGrpSpPr>
+      <p:grpSpPr/>
+      <p:sp>
+        <p:nvSpPr>
+          <p:cNvPr id="2" name="TextBox 1"/>
+          <p:cNvSpPr txBox="1"/>
+          <p:nvPr/>
+        </p:nvSpPr>
+        <p:spPr>
+          <a:xfrm>
+            <a:off x="640000" y="380000"/>
+            <a:ext cx="10912000" cy="420000"/>
+          </a:xfrm>
+          <a:prstGeom prst="rect">
+            <a:avLst/>
+          </a:prstGeom>
+          <a:noFill/>
+        </p:spPr>
+        <p:txBody>
+          <a:bodyPr wrap="square">
+            <a:spAutoFit/>
+          </a:bodyPr>
+          <a:lstStyle/>
+          <a:p>
+            <a:pPr>
+              <a:spcAft>
+                <a:spcPts val="630"/>
+              </a:spcAft>
+            </a:pPr>
+            <a:r>
+              <a:rPr sz="1400" b="1">
+                <a:solidFill>
+                  <a:srgbClr val="E8793A"/>
+                </a:solidFill>
+                <a:latin typeface="Nunito Sans"/>
+              </a:rPr>
+              <a:t>BLOQUE 1 · REPASO DE LA UNIDAD</a:t>
+            </a:r>
+          </a:p>
+        </p:txBody>
+      </p:sp>
+      <p:sp>
+        <p:nvSpPr>
+          <p:cNvPr id="3" name="TextBox 2"/>
+          <p:cNvSpPr txBox="1"/>
+          <p:nvPr/>
+        </p:nvSpPr>
+        <p:spPr>
+          <a:xfrm>
+            <a:off x="640000" y="760000"/>
+            <a:ext cx="10912000" cy="800000"/>
+          </a:xfrm>
+          <a:prstGeom prst="rect">
+            <a:avLst/>
+          </a:prstGeom>
+          <a:noFill/>
+        </p:spPr>
+        <p:txBody>
+          <a:bodyPr wrap="square">
+            <a:spAutoFit/>
+          </a:bodyPr>
+          <a:lstStyle/>
+          <a:p>
+            <a:pPr>
+              <a:spcAft>
+                <a:spcPts val="1710"/>
+              </a:spcAft>
+            </a:pPr>
+            <a:r>
+              <a:rPr sz="3800" b="1">
+                <a:solidFill>
+                  <a:srgbClr val="1F2A44"/>
+                </a:solidFill>
+                <a:latin typeface="Fredoka"/>
+              </a:rPr>
+              <a:t>Sesión 15 · Buenas razones</a:t>
             </a:r>
           </a:p>
         </p:txBody>
@@ -6577,7 +6961,7 @@
                           </a:solidFill>
                           <a:latin typeface="Fredoka"/>
                         </a:rPr>
-                        <a:t>Falacia</a:t>
+                        <a:t>Pregunta</a:t>
                       </a:r>
                     </a:p>
                   </a:txBody>
@@ -6599,7 +6983,7 @@
                           </a:solidFill>
                           <a:latin typeface="Fredoka"/>
                         </a:rPr>
-                        <a:t>El truco</a:t>
+                        <a:t>Si falla…</a:t>
                       </a:r>
                     </a:p>
                   </a:txBody>
@@ -6621,7 +7005,7 @@
                           </a:solidFill>
                           <a:latin typeface="Fredoka"/>
                         </a:rPr>
-                        <a:t>La pregunta que la desmonta</a:t>
+                        <a:t>Ejemplo de razón que falla</a:t>
                       </a:r>
                     </a:p>
                   </a:txBody>
@@ -6639,13 +7023,13 @@
                     <a:lstStyle/>
                     <a:p>
                       <a:r>
-                        <a:rPr sz="2000" b="0">
+                        <a:rPr sz="2000" b="1">
                           <a:solidFill>
                             <a:srgbClr val="1F2A44"/>
                           </a:solidFill>
                           <a:latin typeface="Nunito Sans"/>
                         </a:rPr>
-                        <a:t>Ataque a la persona</a:t>
+                        <a:t>¿Es verdad?</a:t>
                       </a:r>
                     </a:p>
                   </a:txBody>
@@ -6667,7 +7051,7 @@
                           </a:solidFill>
                           <a:latin typeface="Nunito Sans"/>
                         </a:rPr>
-                        <a:t>Ataca a quien habla</a:t>
+                        <a:t>La razón es falsa</a:t>
                       </a:r>
                     </a:p>
                   </a:txBody>
@@ -6689,7 +7073,7 @@
                           </a:solidFill>
                           <a:latin typeface="Nunito Sans"/>
                         </a:rPr>
-                        <a:t>¿Qué tiene que ver quién lo dice?</a:t>
+                        <a:t>«Con cuatro horas de sueño tienes de sobra»</a:t>
                       </a:r>
                     </a:p>
                   </a:txBody>
@@ -6707,13 +7091,13 @@
                     <a:lstStyle/>
                     <a:p>
                       <a:r>
-                        <a:rPr sz="2000" b="0">
+                        <a:rPr sz="2000" b="1">
                           <a:solidFill>
                             <a:srgbClr val="1F2A44"/>
                           </a:solidFill>
                           <a:latin typeface="Nunito Sans"/>
                         </a:rPr>
-                        <a:t>«Tú también»</a:t>
+                        <a:t>¿Viene a cuento?</a:t>
                       </a:r>
                     </a:p>
                   </a:txBody>
@@ -6735,7 +7119,7 @@
                           </a:solidFill>
                           <a:latin typeface="Nunito Sans"/>
                         </a:rPr>
-                        <a:t>Tú tampoco lo cumples</a:t>
+                        <a:t>No tiene que ver</a:t>
                       </a:r>
                     </a:p>
                   </a:txBody>
@@ -6757,7 +7141,7 @@
                           </a:solidFill>
                           <a:latin typeface="Nunito Sans"/>
                         </a:rPr>
-                        <a:t>¿Eso hace falso el consejo?</a:t>
+                        <a:t>«Debe ser delegado porque es el más alto»</a:t>
                       </a:r>
                     </a:p>
                   </a:txBody>
@@ -6775,13 +7159,13 @@
                     <a:lstStyle/>
                     <a:p>
                       <a:r>
-                        <a:rPr sz="2000" b="0">
+                        <a:rPr sz="2000" b="1">
                           <a:solidFill>
                             <a:srgbClr val="1F2A44"/>
                           </a:solidFill>
                           <a:latin typeface="Nunito Sans"/>
                         </a:rPr>
-                        <a:t>Hombre de paja</a:t>
+                        <a:t>¿Es suficiente?</a:t>
                       </a:r>
                     </a:p>
                   </a:txBody>
@@ -6803,7 +7187,7 @@
                           </a:solidFill>
                           <a:latin typeface="Nunito Sans"/>
                         </a:rPr>
-                        <a:t>Deforma la idea del otro</a:t>
+                        <a:t>No basta</a:t>
                       </a:r>
                     </a:p>
                   </a:txBody>
@@ -6825,410 +7209,7 @@
                           </a:solidFill>
                           <a:latin typeface="Nunito Sans"/>
                         </a:rPr>
-                        <a:t>¿Es eso exactamente lo que he dicho?</a:t>
-                      </a:r>
-                    </a:p>
-                  </a:txBody>
-                  <a:tcPr>
-                    <a:solidFill>
-                      <a:srgbClr val="FFFFFF"/>
-                    </a:solidFill>
-                  </a:tcPr>
-                </a:tc>
-              </a:tr>
-            </a:tbl>
-          </a:graphicData>
-        </a:graphic>
-      </p:graphicFrame>
-    </p:spTree>
-  </p:cSld>
-  <p:clrMapOvr>
-    <a:masterClrMapping/>
-  </p:clrMapOvr>
-</p:sld>
-</file>
-
-<file path=ppt/slides/slide8.xml><?xml version="1.0" encoding="utf-8"?>
-<p:sld xmlns:a="http://schemas.openxmlformats.org/drawingml/2006/main" xmlns:p="http://schemas.openxmlformats.org/presentationml/2006/main" xmlns:r="http://schemas.openxmlformats.org/officeDocument/2006/relationships">
-  <p:cSld>
-    <p:bg>
-      <p:bgPr>
-        <a:solidFill>
-          <a:srgbClr val="FBF7EF"/>
-        </a:solidFill>
-        <a:effectLst/>
-      </p:bgPr>
-    </p:bg>
-    <p:spTree>
-      <p:nvGrpSpPr>
-        <p:cNvPr id="1" name=""/>
-        <p:cNvGrpSpPr/>
-        <p:nvPr/>
-      </p:nvGrpSpPr>
-      <p:grpSpPr/>
-      <p:sp>
-        <p:nvSpPr>
-          <p:cNvPr id="2" name="TextBox 1"/>
-          <p:cNvSpPr txBox="1"/>
-          <p:nvPr/>
-        </p:nvSpPr>
-        <p:spPr>
-          <a:xfrm>
-            <a:off x="640000" y="380000"/>
-            <a:ext cx="10912000" cy="420000"/>
-          </a:xfrm>
-          <a:prstGeom prst="rect">
-            <a:avLst/>
-          </a:prstGeom>
-          <a:noFill/>
-        </p:spPr>
-        <p:txBody>
-          <a:bodyPr wrap="square">
-            <a:spAutoFit/>
-          </a:bodyPr>
-          <a:lstStyle/>
-          <a:p>
-            <a:pPr>
-              <a:spcAft>
-                <a:spcPts val="630"/>
-              </a:spcAft>
-            </a:pPr>
-            <a:r>
-              <a:rPr sz="1400" b="1">
-                <a:solidFill>
-                  <a:srgbClr val="E8793A"/>
-                </a:solidFill>
-                <a:latin typeface="Nunito Sans"/>
-              </a:rPr>
-              <a:t>BLOQUE 1 · REPASO DE LA UNIDAD</a:t>
-            </a:r>
-          </a:p>
-        </p:txBody>
-      </p:sp>
-      <p:sp>
-        <p:nvSpPr>
-          <p:cNvPr id="3" name="TextBox 2"/>
-          <p:cNvSpPr txBox="1"/>
-          <p:nvPr/>
-        </p:nvSpPr>
-        <p:spPr>
-          <a:xfrm>
-            <a:off x="640000" y="760000"/>
-            <a:ext cx="10912000" cy="800000"/>
-          </a:xfrm>
-          <a:prstGeom prst="rect">
-            <a:avLst/>
-          </a:prstGeom>
-          <a:noFill/>
-        </p:spPr>
-        <p:txBody>
-          <a:bodyPr wrap="square">
-            <a:spAutoFit/>
-          </a:bodyPr>
-          <a:lstStyle/>
-          <a:p>
-            <a:pPr>
-              <a:spcAft>
-                <a:spcPts val="1710"/>
-              </a:spcAft>
-            </a:pPr>
-            <a:r>
-              <a:rPr sz="3800" b="1">
-                <a:solidFill>
-                  <a:srgbClr val="1F2A44"/>
-                </a:solidFill>
-                <a:latin typeface="Fredoka"/>
-              </a:rPr>
-              <a:t>Emocionar y desviar (sesiones 16 y 17)</a:t>
-            </a:r>
-          </a:p>
-        </p:txBody>
-      </p:sp>
-      <p:graphicFrame>
-        <p:nvGraphicFramePr>
-          <p:cNvPr id="4" name="Table 3"/>
-          <p:cNvGraphicFramePr>
-            <a:graphicFrameLocks noGrp="1"/>
-          </p:cNvGraphicFramePr>
-          <p:nvPr/>
-        </p:nvGraphicFramePr>
-        <p:xfrm>
-          <a:off x="640000" y="1700000"/>
-          <a:ext cx="10912000" cy="2400000"/>
-        </p:xfrm>
-        <a:graphic>
-          <a:graphicData uri="http://schemas.openxmlformats.org/drawingml/2006/table">
-            <a:tbl>
-              <a:tblPr firstRow="1" bandRow="1">
-                <a:tableStyleId>{5C22544A-7EE6-4342-B048-85BDC9FD1C3A}</a:tableStyleId>
-              </a:tblPr>
-              <a:tblGrid>
-                <a:gridCol w="3637333"/>
-                <a:gridCol w="3637333"/>
-                <a:gridCol w="3637334"/>
-              </a:tblGrid>
-              <a:tr h="600000">
-                <a:tc>
-                  <a:txBody>
-                    <a:bodyPr/>
-                    <a:lstStyle/>
-                    <a:p>
-                      <a:r>
-                        <a:rPr sz="2000" b="1">
-                          <a:solidFill>
-                            <a:srgbClr val="FBF7EF"/>
-                          </a:solidFill>
-                          <a:latin typeface="Fredoka"/>
-                        </a:rPr>
-                        <a:t>Falacia</a:t>
-                      </a:r>
-                    </a:p>
-                  </a:txBody>
-                  <a:tcPr>
-                    <a:solidFill>
-                      <a:srgbClr val="1F2A44"/>
-                    </a:solidFill>
-                  </a:tcPr>
-                </a:tc>
-                <a:tc>
-                  <a:txBody>
-                    <a:bodyPr/>
-                    <a:lstStyle/>
-                    <a:p>
-                      <a:r>
-                        <a:rPr sz="2000" b="1">
-                          <a:solidFill>
-                            <a:srgbClr val="FBF7EF"/>
-                          </a:solidFill>
-                          <a:latin typeface="Fredoka"/>
-                        </a:rPr>
-                        <a:t>El truco</a:t>
-                      </a:r>
-                    </a:p>
-                  </a:txBody>
-                  <a:tcPr>
-                    <a:solidFill>
-                      <a:srgbClr val="1F2A44"/>
-                    </a:solidFill>
-                  </a:tcPr>
-                </a:tc>
-                <a:tc>
-                  <a:txBody>
-                    <a:bodyPr/>
-                    <a:lstStyle/>
-                    <a:p>
-                      <a:r>
-                        <a:rPr sz="2000" b="1">
-                          <a:solidFill>
-                            <a:srgbClr val="FBF7EF"/>
-                          </a:solidFill>
-                          <a:latin typeface="Fredoka"/>
-                        </a:rPr>
-                        <a:t>La pregunta que la desmonta</a:t>
-                      </a:r>
-                    </a:p>
-                  </a:txBody>
-                  <a:tcPr>
-                    <a:solidFill>
-                      <a:srgbClr val="1F2A44"/>
-                    </a:solidFill>
-                  </a:tcPr>
-                </a:tc>
-              </a:tr>
-              <a:tr h="600000">
-                <a:tc>
-                  <a:txBody>
-                    <a:bodyPr/>
-                    <a:lstStyle/>
-                    <a:p>
-                      <a:r>
-                        <a:rPr sz="2000" b="0">
-                          <a:solidFill>
-                            <a:srgbClr val="1F2A44"/>
-                          </a:solidFill>
-                          <a:latin typeface="Nunito Sans"/>
-                        </a:rPr>
-                        <a:t>Apelación al miedo</a:t>
-                      </a:r>
-                    </a:p>
-                  </a:txBody>
-                  <a:tcPr>
-                    <a:solidFill>
-                      <a:srgbClr val="FFFFFF"/>
-                    </a:solidFill>
-                  </a:tcPr>
-                </a:tc>
-                <a:tc>
-                  <a:txBody>
-                    <a:bodyPr/>
-                    <a:lstStyle/>
-                    <a:p>
-                      <a:r>
-                        <a:rPr sz="2000" b="0">
-                          <a:solidFill>
-                            <a:srgbClr val="1F2A44"/>
-                          </a:solidFill>
-                          <a:latin typeface="Nunito Sans"/>
-                        </a:rPr>
-                        <a:t>Asusta sin pruebas</a:t>
-                      </a:r>
-                    </a:p>
-                  </a:txBody>
-                  <a:tcPr>
-                    <a:solidFill>
-                      <a:srgbClr val="FFFFFF"/>
-                    </a:solidFill>
-                  </a:tcPr>
-                </a:tc>
-                <a:tc>
-                  <a:txBody>
-                    <a:bodyPr/>
-                    <a:lstStyle/>
-                    <a:p>
-                      <a:r>
-                        <a:rPr sz="2000" b="0">
-                          <a:solidFill>
-                            <a:srgbClr val="1F2A44"/>
-                          </a:solidFill>
-                          <a:latin typeface="Nunito Sans"/>
-                        </a:rPr>
-                        <a:t>¿Ese peligro es real?</a:t>
-                      </a:r>
-                    </a:p>
-                  </a:txBody>
-                  <a:tcPr>
-                    <a:solidFill>
-                      <a:srgbClr val="FFFFFF"/>
-                    </a:solidFill>
-                  </a:tcPr>
-                </a:tc>
-              </a:tr>
-              <a:tr h="600000">
-                <a:tc>
-                  <a:txBody>
-                    <a:bodyPr/>
-                    <a:lstStyle/>
-                    <a:p>
-                      <a:r>
-                        <a:rPr sz="2000" b="0">
-                          <a:solidFill>
-                            <a:srgbClr val="1F2A44"/>
-                          </a:solidFill>
-                          <a:latin typeface="Nunito Sans"/>
-                        </a:rPr>
-                        <a:t>Apelación a la pena</a:t>
-                      </a:r>
-                    </a:p>
-                  </a:txBody>
-                  <a:tcPr>
-                    <a:solidFill>
-                      <a:srgbClr val="EAF0F7"/>
-                    </a:solidFill>
-                  </a:tcPr>
-                </a:tc>
-                <a:tc>
-                  <a:txBody>
-                    <a:bodyPr/>
-                    <a:lstStyle/>
-                    <a:p>
-                      <a:r>
-                        <a:rPr sz="2000" b="0">
-                          <a:solidFill>
-                            <a:srgbClr val="1F2A44"/>
-                          </a:solidFill>
-                          <a:latin typeface="Nunito Sans"/>
-                        </a:rPr>
-                        <a:t>Da pena, no razones</a:t>
-                      </a:r>
-                    </a:p>
-                  </a:txBody>
-                  <a:tcPr>
-                    <a:solidFill>
-                      <a:srgbClr val="EAF0F7"/>
-                    </a:solidFill>
-                  </a:tcPr>
-                </a:tc>
-                <a:tc>
-                  <a:txBody>
-                    <a:bodyPr/>
-                    <a:lstStyle/>
-                    <a:p>
-                      <a:r>
-                        <a:rPr sz="2000" b="0">
-                          <a:solidFill>
-                            <a:srgbClr val="1F2A44"/>
-                          </a:solidFill>
-                          <a:latin typeface="Nunito Sans"/>
-                        </a:rPr>
-                        <a:t>Si quito la pena, ¿qué razón queda?</a:t>
-                      </a:r>
-                    </a:p>
-                  </a:txBody>
-                  <a:tcPr>
-                    <a:solidFill>
-                      <a:srgbClr val="EAF0F7"/>
-                    </a:solidFill>
-                  </a:tcPr>
-                </a:tc>
-              </a:tr>
-              <a:tr h="600000">
-                <a:tc>
-                  <a:txBody>
-                    <a:bodyPr/>
-                    <a:lstStyle/>
-                    <a:p>
-                      <a:r>
-                        <a:rPr sz="2000" b="0">
-                          <a:solidFill>
-                            <a:srgbClr val="1F2A44"/>
-                          </a:solidFill>
-                          <a:latin typeface="Nunito Sans"/>
-                        </a:rPr>
-                        <a:t>Pista falsa</a:t>
-                      </a:r>
-                    </a:p>
-                  </a:txBody>
-                  <a:tcPr>
-                    <a:solidFill>
-                      <a:srgbClr val="FFFFFF"/>
-                    </a:solidFill>
-                  </a:tcPr>
-                </a:tc>
-                <a:tc>
-                  <a:txBody>
-                    <a:bodyPr/>
-                    <a:lstStyle/>
-                    <a:p>
-                      <a:r>
-                        <a:rPr sz="2000" b="0">
-                          <a:solidFill>
-                            <a:srgbClr val="1F2A44"/>
-                          </a:solidFill>
-                          <a:latin typeface="Nunito Sans"/>
-                        </a:rPr>
-                        <a:t>Cambia de tema</a:t>
-                      </a:r>
-                    </a:p>
-                  </a:txBody>
-                  <a:tcPr>
-                    <a:solidFill>
-                      <a:srgbClr val="FFFFFF"/>
-                    </a:solidFill>
-                  </a:tcPr>
-                </a:tc>
-                <a:tc>
-                  <a:txBody>
-                    <a:bodyPr/>
-                    <a:lstStyle/>
-                    <a:p>
-                      <a:r>
-                        <a:rPr sz="2000" b="0">
-                          <a:solidFill>
-                            <a:srgbClr val="1F2A44"/>
-                          </a:solidFill>
-                          <a:latin typeface="Nunito Sans"/>
-                        </a:rPr>
-                        <a:t>¿Qué tiene que ver con lo que hablábamos?</a:t>
+                        <a:t>«Son unos vagos: uno no trajo los deberes»</a:t>
                       </a:r>
                     </a:p>
                   </a:txBody>
@@ -7342,421 +7323,242 @@
                 </a:solidFill>
                 <a:latin typeface="Fredoka"/>
               </a:rPr>
-              <a:t>Lo que no es falacia</a:t>
-            </a:r>
-          </a:p>
-        </p:txBody>
-      </p:sp>
-      <p:sp>
-        <p:nvSpPr>
-          <p:cNvPr id="4" name="Rectangle 3"/>
-          <p:cNvSpPr/>
+              <a:t>Sesión 16 · Deducción e inducción</a:t>
+            </a:r>
+          </a:p>
+        </p:txBody>
+      </p:sp>
+      <p:graphicFrame>
+        <p:nvGraphicFramePr>
+          <p:cNvPr id="4" name="Table 3"/>
+          <p:cNvGraphicFramePr>
+            <a:graphicFrameLocks noGrp="1"/>
+          </p:cNvGraphicFramePr>
           <p:nvPr/>
-        </p:nvSpPr>
-        <p:spPr>
-          <a:xfrm>
-            <a:off x="640000" y="1650000"/>
-            <a:ext cx="5306000" cy="4400000"/>
-          </a:xfrm>
-          <a:prstGeom prst="rect">
-            <a:avLst/>
-          </a:prstGeom>
-          <a:solidFill>
-            <a:srgbClr val="FBE3D2"/>
-          </a:solidFill>
-          <a:ln>
-            <a:noFill/>
-          </a:ln>
-        </p:spPr>
-        <p:style>
-          <a:lnRef idx="1">
-            <a:schemeClr val="accent1"/>
-          </a:lnRef>
-          <a:fillRef idx="3">
-            <a:schemeClr val="accent1"/>
-          </a:fillRef>
-          <a:effectRef idx="2">
-            <a:schemeClr val="accent1"/>
-          </a:effectRef>
-          <a:fontRef idx="minor">
-            <a:schemeClr val="lt1"/>
-          </a:fontRef>
-        </p:style>
-        <p:txBody>
-          <a:bodyPr rtlCol="0" anchor="ctr"/>
-          <a:lstStyle/>
-          <a:p>
-            <a:pPr algn="ctr"/>
-          </a:p>
-        </p:txBody>
-      </p:sp>
-      <p:sp>
-        <p:nvSpPr>
-          <p:cNvPr id="5" name="TextBox 4"/>
-          <p:cNvSpPr txBox="1"/>
-          <p:nvPr/>
-        </p:nvSpPr>
-        <p:spPr>
-          <a:xfrm>
-            <a:off x="840000" y="1750000"/>
-            <a:ext cx="4906000" cy="600000"/>
-          </a:xfrm>
-          <a:prstGeom prst="rect">
-            <a:avLst/>
-          </a:prstGeom>
-          <a:noFill/>
-        </p:spPr>
-        <p:txBody>
-          <a:bodyPr wrap="square">
-            <a:spAutoFit/>
-          </a:bodyPr>
-          <a:lstStyle/>
-          <a:p>
-            <a:pPr>
-              <a:spcAft>
-                <a:spcPts val="1260"/>
-              </a:spcAft>
-            </a:pPr>
-            <a:r>
-              <a:rPr sz="2800" b="1">
-                <a:solidFill>
-                  <a:srgbClr val="C2531C"/>
-                </a:solidFill>
-                <a:latin typeface="Nunito Sans"/>
-              </a:rPr>
-              <a:t>Falacia</a:t>
-            </a:r>
-          </a:p>
-        </p:txBody>
-      </p:sp>
-      <p:sp>
-        <p:nvSpPr>
-          <p:cNvPr id="6" name="TextBox 5"/>
-          <p:cNvSpPr txBox="1"/>
-          <p:nvPr/>
-        </p:nvSpPr>
-        <p:spPr>
-          <a:xfrm>
-            <a:off x="840000" y="2400000"/>
-            <a:ext cx="4906000" cy="3500000"/>
-          </a:xfrm>
-          <a:prstGeom prst="rect">
-            <a:avLst/>
-          </a:prstGeom>
-          <a:noFill/>
-        </p:spPr>
-        <p:txBody>
-          <a:bodyPr wrap="square">
-            <a:spAutoFit/>
-          </a:bodyPr>
-          <a:lstStyle/>
-          <a:p>
-            <a:pPr>
-              <a:spcAft>
-                <a:spcPts val="1170"/>
-              </a:spcAft>
-            </a:pPr>
-            <a:r>
-              <a:rPr sz="2600" b="1">
-                <a:solidFill>
-                  <a:srgbClr val="E8793A"/>
-                </a:solidFill>
-                <a:latin typeface="Nunito Sans"/>
-              </a:rPr>
-              <a:t>• </a:t>
-            </a:r>
-            <a:r>
-              <a:rPr sz="2600" b="0">
-                <a:solidFill>
-                  <a:srgbClr val="1F2A44"/>
-                </a:solidFill>
-                <a:latin typeface="Nunito Sans"/>
-              </a:rPr>
-              <a:t>Atacar a la persona sin más</a:t>
-            </a:r>
-          </a:p>
-          <a:p>
-            <a:pPr>
-              <a:spcAft>
-                <a:spcPts val="1170"/>
-              </a:spcAft>
-            </a:pPr>
-            <a:r>
-              <a:rPr sz="2600" b="1">
-                <a:solidFill>
-                  <a:srgbClr val="E8793A"/>
-                </a:solidFill>
-                <a:latin typeface="Nunito Sans"/>
-              </a:rPr>
-              <a:t>• </a:t>
-            </a:r>
-            <a:r>
-              <a:rPr sz="2600" b="0">
-                <a:solidFill>
-                  <a:srgbClr val="1F2A44"/>
-                </a:solidFill>
-                <a:latin typeface="Nunito Sans"/>
-              </a:rPr>
-              <a:t>Exagerar la idea del otro</a:t>
-            </a:r>
-          </a:p>
-          <a:p>
-            <a:pPr>
-              <a:spcAft>
-                <a:spcPts val="1170"/>
-              </a:spcAft>
-            </a:pPr>
-            <a:r>
-              <a:rPr sz="2600" b="1">
-                <a:solidFill>
-                  <a:srgbClr val="E8793A"/>
-                </a:solidFill>
-                <a:latin typeface="Nunito Sans"/>
-              </a:rPr>
-              <a:t>• </a:t>
-            </a:r>
-            <a:r>
-              <a:rPr sz="2600" b="0">
-                <a:solidFill>
-                  <a:srgbClr val="1F2A44"/>
-                </a:solidFill>
-                <a:latin typeface="Nunito Sans"/>
-              </a:rPr>
-              <a:t>Asustar sin pruebas</a:t>
-            </a:r>
-          </a:p>
-          <a:p>
-            <a:pPr>
-              <a:spcAft>
-                <a:spcPts val="1170"/>
-              </a:spcAft>
-            </a:pPr>
-            <a:r>
-              <a:rPr sz="2600" b="1">
-                <a:solidFill>
-                  <a:srgbClr val="E8793A"/>
-                </a:solidFill>
-                <a:latin typeface="Nunito Sans"/>
-              </a:rPr>
-              <a:t>• </a:t>
-            </a:r>
-            <a:r>
-              <a:rPr sz="2600" b="0">
-                <a:solidFill>
-                  <a:srgbClr val="1F2A44"/>
-                </a:solidFill>
-                <a:latin typeface="Nunito Sans"/>
-              </a:rPr>
-              <a:t>Cambiar de tema para esquivar</a:t>
-            </a:r>
-          </a:p>
-        </p:txBody>
-      </p:sp>
-      <p:sp>
-        <p:nvSpPr>
-          <p:cNvPr id="7" name="Rectangle 6"/>
-          <p:cNvSpPr/>
-          <p:nvPr/>
-        </p:nvSpPr>
-        <p:spPr>
-          <a:xfrm>
-            <a:off x="6246000" y="1650000"/>
-            <a:ext cx="5306000" cy="4400000"/>
-          </a:xfrm>
-          <a:prstGeom prst="rect">
-            <a:avLst/>
-          </a:prstGeom>
-          <a:solidFill>
-            <a:srgbClr val="EAF0F7"/>
-          </a:solidFill>
-          <a:ln>
-            <a:noFill/>
-          </a:ln>
-        </p:spPr>
-        <p:style>
-          <a:lnRef idx="1">
-            <a:schemeClr val="accent1"/>
-          </a:lnRef>
-          <a:fillRef idx="3">
-            <a:schemeClr val="accent1"/>
-          </a:fillRef>
-          <a:effectRef idx="2">
-            <a:schemeClr val="accent1"/>
-          </a:effectRef>
-          <a:fontRef idx="minor">
-            <a:schemeClr val="lt1"/>
-          </a:fontRef>
-        </p:style>
-        <p:txBody>
-          <a:bodyPr rtlCol="0" anchor="ctr"/>
-          <a:lstStyle/>
-          <a:p>
-            <a:pPr algn="ctr"/>
-          </a:p>
-        </p:txBody>
-      </p:sp>
-      <p:sp>
-        <p:nvSpPr>
-          <p:cNvPr id="8" name="TextBox 7"/>
-          <p:cNvSpPr txBox="1"/>
-          <p:nvPr/>
-        </p:nvSpPr>
-        <p:spPr>
-          <a:xfrm>
-            <a:off x="6446000" y="1750000"/>
-            <a:ext cx="4906000" cy="600000"/>
-          </a:xfrm>
-          <a:prstGeom prst="rect">
-            <a:avLst/>
-          </a:prstGeom>
-          <a:noFill/>
-        </p:spPr>
-        <p:txBody>
-          <a:bodyPr wrap="square">
-            <a:spAutoFit/>
-          </a:bodyPr>
-          <a:lstStyle/>
-          <a:p>
-            <a:pPr>
-              <a:spcAft>
-                <a:spcPts val="1260"/>
-              </a:spcAft>
-            </a:pPr>
-            <a:r>
-              <a:rPr sz="2800" b="1">
-                <a:solidFill>
-                  <a:srgbClr val="2F6FB5"/>
-                </a:solidFill>
-                <a:latin typeface="Nunito Sans"/>
-              </a:rPr>
-              <a:t>Legítimo</a:t>
-            </a:r>
-          </a:p>
-        </p:txBody>
-      </p:sp>
-      <p:sp>
-        <p:nvSpPr>
-          <p:cNvPr id="9" name="TextBox 8"/>
-          <p:cNvSpPr txBox="1"/>
-          <p:nvPr/>
-        </p:nvSpPr>
-        <p:spPr>
-          <a:xfrm>
-            <a:off x="6446000" y="2400000"/>
-            <a:ext cx="4906000" cy="3500000"/>
-          </a:xfrm>
-          <a:prstGeom prst="rect">
-            <a:avLst/>
-          </a:prstGeom>
-          <a:noFill/>
-        </p:spPr>
-        <p:txBody>
-          <a:bodyPr wrap="square">
-            <a:spAutoFit/>
-          </a:bodyPr>
-          <a:lstStyle/>
-          <a:p>
-            <a:pPr>
-              <a:spcAft>
-                <a:spcPts val="1170"/>
-              </a:spcAft>
-            </a:pPr>
-            <a:r>
-              <a:rPr sz="2600" b="1">
-                <a:solidFill>
-                  <a:srgbClr val="E8793A"/>
-                </a:solidFill>
-                <a:latin typeface="Nunito Sans"/>
-              </a:rPr>
-              <a:t>• </a:t>
-            </a:r>
-            <a:r>
-              <a:rPr sz="2600" b="0">
-                <a:solidFill>
-                  <a:srgbClr val="1F2A44"/>
-                </a:solidFill>
-                <a:latin typeface="Nunito Sans"/>
-              </a:rPr>
-              <a:t>Dudar de quien gana dinero con ello</a:t>
-            </a:r>
-          </a:p>
-          <a:p>
-            <a:pPr>
-              <a:spcAft>
-                <a:spcPts val="1170"/>
-              </a:spcAft>
-            </a:pPr>
-            <a:r>
-              <a:rPr sz="2600" b="1">
-                <a:solidFill>
-                  <a:srgbClr val="E8793A"/>
-                </a:solidFill>
-                <a:latin typeface="Nunito Sans"/>
-              </a:rPr>
-              <a:t>• </a:t>
-            </a:r>
-            <a:r>
-              <a:rPr sz="2600" b="0">
-                <a:solidFill>
-                  <a:srgbClr val="1F2A44"/>
-                </a:solidFill>
-                <a:latin typeface="Nunito Sans"/>
-              </a:rPr>
-              <a:t>Resumir la idea con justicia</a:t>
-            </a:r>
-          </a:p>
-          <a:p>
-            <a:pPr>
-              <a:spcAft>
-                <a:spcPts val="1170"/>
-              </a:spcAft>
-            </a:pPr>
-            <a:r>
-              <a:rPr sz="2600" b="1">
-                <a:solidFill>
-                  <a:srgbClr val="E8793A"/>
-                </a:solidFill>
-                <a:latin typeface="Nunito Sans"/>
-              </a:rPr>
-              <a:t>• </a:t>
-            </a:r>
-            <a:r>
-              <a:rPr sz="2600" b="0">
-                <a:solidFill>
-                  <a:srgbClr val="1F2A44"/>
-                </a:solidFill>
-                <a:latin typeface="Nunito Sans"/>
-              </a:rPr>
-              <a:t>Avisar de un peligro real con razones</a:t>
-            </a:r>
-          </a:p>
-          <a:p>
-            <a:pPr>
-              <a:spcAft>
-                <a:spcPts val="1170"/>
-              </a:spcAft>
-            </a:pPr>
-            <a:r>
-              <a:rPr sz="2600" b="1">
-                <a:solidFill>
-                  <a:srgbClr val="E8793A"/>
-                </a:solidFill>
-                <a:latin typeface="Nunito Sans"/>
-              </a:rPr>
-              <a:t>• </a:t>
-            </a:r>
-            <a:r>
-              <a:rPr sz="2600" b="0">
-                <a:solidFill>
-                  <a:srgbClr val="1F2A44"/>
-                </a:solidFill>
-                <a:latin typeface="Nunito Sans"/>
-              </a:rPr>
-              <a:t>Cambiar de tema por algo urgente</a:t>
-            </a:r>
-          </a:p>
-        </p:txBody>
-      </p:sp>
+        </p:nvGraphicFramePr>
+        <p:xfrm>
+          <a:off x="640000" y="1700000"/>
+          <a:ext cx="10912000" cy="1800000"/>
+        </p:xfrm>
+        <a:graphic>
+          <a:graphicData uri="http://schemas.openxmlformats.org/drawingml/2006/table">
+            <a:tbl>
+              <a:tblPr firstRow="1" bandRow="1">
+                <a:tableStyleId>{5C22544A-7EE6-4342-B048-85BDC9FD1C3A}</a:tableStyleId>
+              </a:tblPr>
+              <a:tblGrid>
+                <a:gridCol w="3637333"/>
+                <a:gridCol w="3637333"/>
+                <a:gridCol w="3637334"/>
+              </a:tblGrid>
+              <a:tr h="600000">
+                <a:tc>
+                  <a:txBody>
+                    <a:bodyPr/>
+                    <a:lstStyle/>
+                    <a:p>
+                      <a:r>
+                        <a:rPr sz="2000" b="1">
+                          <a:solidFill>
+                            <a:srgbClr val="FBF7EF"/>
+                          </a:solidFill>
+                          <a:latin typeface="Fredoka"/>
+                        </a:rPr>
+                        <a:t>Tipo</a:t>
+                      </a:r>
+                    </a:p>
+                  </a:txBody>
+                  <a:tcPr>
+                    <a:solidFill>
+                      <a:srgbClr val="1F2A44"/>
+                    </a:solidFill>
+                  </a:tcPr>
+                </a:tc>
+                <a:tc>
+                  <a:txBody>
+                    <a:bodyPr/>
+                    <a:lstStyle/>
+                    <a:p>
+                      <a:r>
+                        <a:rPr sz="2000" b="1">
+                          <a:solidFill>
+                            <a:srgbClr val="FBF7EF"/>
+                          </a:solidFill>
+                          <a:latin typeface="Fredoka"/>
+                        </a:rPr>
+                        <a:t>Conclusión</a:t>
+                      </a:r>
+                    </a:p>
+                  </a:txBody>
+                  <a:tcPr>
+                    <a:solidFill>
+                      <a:srgbClr val="1F2A44"/>
+                    </a:solidFill>
+                  </a:tcPr>
+                </a:tc>
+                <a:tc>
+                  <a:txBody>
+                    <a:bodyPr/>
+                    <a:lstStyle/>
+                    <a:p>
+                      <a:r>
+                        <a:rPr sz="2000" b="1">
+                          <a:solidFill>
+                            <a:srgbClr val="FBF7EF"/>
+                          </a:solidFill>
+                          <a:latin typeface="Fredoka"/>
+                        </a:rPr>
+                        <a:t>Ejemplo</a:t>
+                      </a:r>
+                    </a:p>
+                  </a:txBody>
+                  <a:tcPr>
+                    <a:solidFill>
+                      <a:srgbClr val="1F2A44"/>
+                    </a:solidFill>
+                  </a:tcPr>
+                </a:tc>
+              </a:tr>
+              <a:tr h="600000">
+                <a:tc>
+                  <a:txBody>
+                    <a:bodyPr/>
+                    <a:lstStyle/>
+                    <a:p>
+                      <a:r>
+                        <a:rPr sz="2000" b="1">
+                          <a:solidFill>
+                            <a:srgbClr val="1F2A44"/>
+                          </a:solidFill>
+                          <a:latin typeface="Nunito Sans"/>
+                        </a:rPr>
+                        <a:t>Deducción</a:t>
+                      </a:r>
+                    </a:p>
+                  </a:txBody>
+                  <a:tcPr>
+                    <a:solidFill>
+                      <a:srgbClr val="FFFFFF"/>
+                    </a:solidFill>
+                  </a:tcPr>
+                </a:tc>
+                <a:tc>
+                  <a:txBody>
+                    <a:bodyPr/>
+                    <a:lstStyle/>
+                    <a:p>
+                      <a:r>
+                        <a:rPr sz="2000" b="0">
+                          <a:solidFill>
+                            <a:srgbClr val="1F2A44"/>
+                          </a:solidFill>
+                          <a:latin typeface="Nunito Sans"/>
+                        </a:rPr>
+                        <a:t>Segura, si está bien hecha y las premisas son verdad</a:t>
+                      </a:r>
+                    </a:p>
+                  </a:txBody>
+                  <a:tcPr>
+                    <a:solidFill>
+                      <a:srgbClr val="FFFFFF"/>
+                    </a:solidFill>
+                  </a:tcPr>
+                </a:tc>
+                <a:tc>
+                  <a:txBody>
+                    <a:bodyPr/>
+                    <a:lstStyle/>
+                    <a:p>
+                      <a:r>
+                        <a:rPr sz="2000" b="0">
+                          <a:solidFill>
+                            <a:srgbClr val="1F2A44"/>
+                          </a:solidFill>
+                          <a:latin typeface="Nunito Sans"/>
+                        </a:rPr>
+                        <a:t>Todos los de 2.º tienen Inglés; un chico es de 2.º…</a:t>
+                      </a:r>
+                    </a:p>
+                  </a:txBody>
+                  <a:tcPr>
+                    <a:solidFill>
+                      <a:srgbClr val="FFFFFF"/>
+                    </a:solidFill>
+                  </a:tcPr>
+                </a:tc>
+              </a:tr>
+              <a:tr h="600000">
+                <a:tc>
+                  <a:txBody>
+                    <a:bodyPr/>
+                    <a:lstStyle/>
+                    <a:p>
+                      <a:r>
+                        <a:rPr sz="2000" b="1">
+                          <a:solidFill>
+                            <a:srgbClr val="1F2A44"/>
+                          </a:solidFill>
+                          <a:latin typeface="Nunito Sans"/>
+                        </a:rPr>
+                        <a:t>Inducción</a:t>
+                      </a:r>
+                    </a:p>
+                  </a:txBody>
+                  <a:tcPr>
+                    <a:solidFill>
+                      <a:srgbClr val="EAF0F7"/>
+                    </a:solidFill>
+                  </a:tcPr>
+                </a:tc>
+                <a:tc>
+                  <a:txBody>
+                    <a:bodyPr/>
+                    <a:lstStyle/>
+                    <a:p>
+                      <a:r>
+                        <a:rPr sz="2000" b="0">
+                          <a:solidFill>
+                            <a:srgbClr val="1F2A44"/>
+                          </a:solidFill>
+                          <a:latin typeface="Nunito Sans"/>
+                        </a:rPr>
+                        <a:t>Probable: puede fallar</a:t>
+                      </a:r>
+                    </a:p>
+                  </a:txBody>
+                  <a:tcPr>
+                    <a:solidFill>
+                      <a:srgbClr val="EAF0F7"/>
+                    </a:solidFill>
+                  </a:tcPr>
+                </a:tc>
+                <a:tc>
+                  <a:txBody>
+                    <a:bodyPr/>
+                    <a:lstStyle/>
+                    <a:p>
+                      <a:r>
+                        <a:rPr sz="2000" b="0">
+                          <a:solidFill>
+                            <a:srgbClr val="1F2A44"/>
+                          </a:solidFill>
+                          <a:latin typeface="Nunito Sans"/>
+                        </a:rPr>
+                        <a:t>La pizza siempre llega fría; hoy también</a:t>
+                      </a:r>
+                    </a:p>
+                  </a:txBody>
+                  <a:tcPr>
+                    <a:solidFill>
+                      <a:srgbClr val="EAF0F7"/>
+                    </a:solidFill>
+                  </a:tcPr>
+                </a:tc>
+              </a:tr>
+            </a:tbl>
+          </a:graphicData>
+        </a:graphic>
+      </p:graphicFrame>
     </p:spTree>
   </p:cSld>
   <p:clrMapOvr>
